--- a/slaydlar/M7.pptx
+++ b/slaydlar/M7.pptx
@@ -7346,12 +7346,12 @@
         </p:nvSpPr>
         <p:spPr>
           <a:xfrm>
-            <a:off x="550000" y="1300000"/>
-            <a:ext cx="11100000" cy="1147500"/>
+            <a:off x="550000" y="1541824"/>
+            <a:ext cx="11100000" cy="1034088"/>
           </a:xfrm>
           <a:prstGeom prst="roundRect">
             <a:avLst>
-              <a:gd name="adj" fmla="val 18000"/>
+              <a:gd name="adj" fmla="val 8000"/>
             </a:avLst>
           </a:prstGeom>
           <a:solidFill>
@@ -7392,8 +7392,8 @@
         </p:nvSpPr>
         <p:spPr>
           <a:xfrm>
-            <a:off x="550000" y="1300000"/>
-            <a:ext cx="70000" cy="1147500"/>
+            <a:off x="550000" y="1541824"/>
+            <a:ext cx="70000" cy="1034088"/>
           </a:xfrm>
           <a:prstGeom prst="rect">
             <a:avLst/>
@@ -7436,8 +7436,8 @@
         </p:nvSpPr>
         <p:spPr>
           <a:xfrm>
-            <a:off x="800000" y="1643750"/>
-            <a:ext cx="460000" cy="460000"/>
+            <a:off x="780000" y="1848868"/>
+            <a:ext cx="420000" cy="420000"/>
           </a:xfrm>
           <a:prstGeom prst="ellipse">
             <a:avLst/>
@@ -7470,7 +7470,7 @@
           <a:p>
             <a:pPr algn="ctr"/>
             <a:r>
-              <a:rPr sz="1600" b="1">
+              <a:rPr sz="1400" b="1">
                 <a:solidFill>
                   <a:srgbClr val="FFFFFF"/>
                 </a:solidFill>
@@ -7489,8 +7489,8 @@
         </p:nvSpPr>
         <p:spPr>
           <a:xfrm>
-            <a:off x="1450000" y="1300000"/>
-            <a:ext cx="10050000" cy="1147500"/>
+            <a:off x="1380000" y="1581824"/>
+            <a:ext cx="10150000" cy="954088"/>
           </a:xfrm>
           <a:prstGeom prst="rect">
             <a:avLst/>
@@ -7498,22 +7498,37 @@
           <a:noFill/>
         </p:spPr>
         <p:txBody>
-          <a:bodyPr wrap="square" anchor="ctr" lIns="50800" rIns="50800">
+          <a:bodyPr wrap="square" anchor="ctr">
             <a:spAutoFit/>
           </a:bodyPr>
           <a:lstStyle/>
           <a:p>
-            <a:pPr algn="l"/>
             <a:r>
-              <a:rPr sz="1600" b="0">
+              <a:rPr sz="1500" b="1">
                 <a:solidFill>
-                  <a:srgbClr val="1B2430"/>
+                  <a:srgbClr val="1F3A5F"/>
                 </a:solidFill>
                 <a:latin typeface="Calibri"/>
               </a:rPr>
               <a:t>Kubernetes umumiy maqsadli orkestrator; u «ushbu 64 GPU'da PyTorch DDP o'qitishini boshla» yoki «giperparametrlarni Bayes usulida qidir» degan tushunchalarni bilmaydi.</a:t>
             </a:r>
           </a:p>
+          <a:p>
+            <a:pPr>
+              <a:spcBef>
+                <a:spcPts val="400"/>
+              </a:spcBef>
+            </a:pPr>
+            <a:r>
+              <a:rPr sz="1400">
+                <a:solidFill>
+                  <a:srgbClr val="334055"/>
+                </a:solidFill>
+                <a:latin typeface="Calibri"/>
+              </a:rPr>
+              <a:t>Shu bo'shliqni AI platformalari to'ldiradi.</a:t>
+            </a:r>
+          </a:p>
         </p:txBody>
       </p:sp>
       <p:sp>
@@ -7524,12 +7539,12 @@
         </p:nvSpPr>
         <p:spPr>
           <a:xfrm>
-            <a:off x="550000" y="2567500"/>
-            <a:ext cx="11100000" cy="1147500"/>
+            <a:off x="550000" y="2685912"/>
+            <a:ext cx="11100000" cy="1034088"/>
           </a:xfrm>
           <a:prstGeom prst="roundRect">
             <a:avLst>
-              <a:gd name="adj" fmla="val 18000"/>
+              <a:gd name="adj" fmla="val 8000"/>
             </a:avLst>
           </a:prstGeom>
           <a:solidFill>
@@ -7570,8 +7585,8 @@
         </p:nvSpPr>
         <p:spPr>
           <a:xfrm>
-            <a:off x="550000" y="2567500"/>
-            <a:ext cx="70000" cy="1147500"/>
+            <a:off x="550000" y="2685912"/>
+            <a:ext cx="70000" cy="1034088"/>
           </a:xfrm>
           <a:prstGeom prst="rect">
             <a:avLst/>
@@ -7614,8 +7629,8 @@
         </p:nvSpPr>
         <p:spPr>
           <a:xfrm>
-            <a:off x="800000" y="2911250"/>
-            <a:ext cx="460000" cy="460000"/>
+            <a:off x="780000" y="2992956"/>
+            <a:ext cx="420000" cy="420000"/>
           </a:xfrm>
           <a:prstGeom prst="ellipse">
             <a:avLst/>
@@ -7648,7 +7663,7 @@
           <a:p>
             <a:pPr algn="ctr"/>
             <a:r>
-              <a:rPr sz="1600" b="1">
+              <a:rPr sz="1400" b="1">
                 <a:solidFill>
                   <a:srgbClr val="FFFFFF"/>
                 </a:solidFill>
@@ -7667,8 +7682,8 @@
         </p:nvSpPr>
         <p:spPr>
           <a:xfrm>
-            <a:off x="1450000" y="2567500"/>
-            <a:ext cx="10050000" cy="1147500"/>
+            <a:off x="1380000" y="2725912"/>
+            <a:ext cx="10150000" cy="954088"/>
           </a:xfrm>
           <a:prstGeom prst="rect">
             <a:avLst/>
@@ -7676,22 +7691,37 @@
           <a:noFill/>
         </p:spPr>
         <p:txBody>
-          <a:bodyPr wrap="square" anchor="ctr" lIns="50800" rIns="50800">
+          <a:bodyPr wrap="square" anchor="ctr">
             <a:spAutoFit/>
           </a:bodyPr>
           <a:lstStyle/>
           <a:p>
-            <a:pPr algn="l"/>
             <a:r>
-              <a:rPr sz="1600" b="0">
+              <a:rPr sz="1500" b="1">
                 <a:solidFill>
-                  <a:srgbClr val="1B2430"/>
+                  <a:srgbClr val="1F3A5F"/>
                 </a:solidFill>
                 <a:latin typeface="Calibri"/>
               </a:rPr>
               <a:t>Ray — Python uchun taqsimlangan hisoblash freymvorki.</a:t>
             </a:r>
           </a:p>
+          <a:p>
+            <a:pPr>
+              <a:spcBef>
+                <a:spcPts val="400"/>
+              </a:spcBef>
+            </a:pPr>
+            <a:r>
+              <a:rPr sz="1400">
+                <a:solidFill>
+                  <a:srgbClr val="334055"/>
+                </a:solidFill>
+                <a:latin typeface="Calibri"/>
+              </a:rPr>
+              <a:t>Uning yadrosi ikkita primitivga tayanadi: @ray.remote funksiyalar (holatsiz vazifalar) va aktorlar (holatli ob'ektlar); ular klasterdagi istalgan tugunda bajariladi, natijalar taqsimlangan ob'ekt omborida saqlanadi.</a:t>
+            </a:r>
+          </a:p>
         </p:txBody>
       </p:sp>
       <p:sp>
@@ -7702,12 +7732,12 @@
         </p:nvSpPr>
         <p:spPr>
           <a:xfrm>
-            <a:off x="550000" y="3835000"/>
-            <a:ext cx="11100000" cy="1147500"/>
+            <a:off x="550000" y="3830000"/>
+            <a:ext cx="11100000" cy="1034088"/>
           </a:xfrm>
           <a:prstGeom prst="roundRect">
             <a:avLst>
-              <a:gd name="adj" fmla="val 18000"/>
+              <a:gd name="adj" fmla="val 8000"/>
             </a:avLst>
           </a:prstGeom>
           <a:solidFill>
@@ -7748,8 +7778,8 @@
         </p:nvSpPr>
         <p:spPr>
           <a:xfrm>
-            <a:off x="550000" y="3835000"/>
-            <a:ext cx="70000" cy="1147500"/>
+            <a:off x="550000" y="3830000"/>
+            <a:ext cx="70000" cy="1034088"/>
           </a:xfrm>
           <a:prstGeom prst="rect">
             <a:avLst/>
@@ -7792,8 +7822,8 @@
         </p:nvSpPr>
         <p:spPr>
           <a:xfrm>
-            <a:off x="800000" y="4178750"/>
-            <a:ext cx="460000" cy="460000"/>
+            <a:off x="780000" y="4137044"/>
+            <a:ext cx="420000" cy="420000"/>
           </a:xfrm>
           <a:prstGeom prst="ellipse">
             <a:avLst/>
@@ -7826,7 +7856,7 @@
           <a:p>
             <a:pPr algn="ctr"/>
             <a:r>
-              <a:rPr sz="1600" b="1">
+              <a:rPr sz="1400" b="1">
                 <a:solidFill>
                   <a:srgbClr val="FFFFFF"/>
                 </a:solidFill>
@@ -7845,8 +7875,8 @@
         </p:nvSpPr>
         <p:spPr>
           <a:xfrm>
-            <a:off x="1450000" y="3835000"/>
-            <a:ext cx="10050000" cy="1147500"/>
+            <a:off x="1380000" y="3870000"/>
+            <a:ext cx="10150000" cy="954088"/>
           </a:xfrm>
           <a:prstGeom prst="rect">
             <a:avLst/>
@@ -7854,22 +7884,37 @@
           <a:noFill/>
         </p:spPr>
         <p:txBody>
-          <a:bodyPr wrap="square" anchor="ctr" lIns="50800" rIns="50800">
+          <a:bodyPr wrap="square" anchor="ctr">
             <a:spAutoFit/>
           </a:bodyPr>
           <a:lstStyle/>
           <a:p>
-            <a:pPr algn="l"/>
             <a:r>
-              <a:rPr sz="1600" b="0">
+              <a:rPr sz="1500" b="1">
                 <a:solidFill>
-                  <a:srgbClr val="1B2430"/>
+                  <a:srgbClr val="1F3A5F"/>
                 </a:solidFill>
                 <a:latin typeface="Calibri"/>
               </a:rPr>
               <a:t>Kubeflow — Kubernetes'da ML ish oqimlari uchun komponentlar to'plami.</a:t>
             </a:r>
           </a:p>
+          <a:p>
+            <a:pPr>
+              <a:spcBef>
+                <a:spcPts val="400"/>
+              </a:spcBef>
+            </a:pPr>
+            <a:r>
+              <a:rPr sz="1400">
+                <a:solidFill>
+                  <a:srgbClr val="334055"/>
+                </a:solidFill>
+                <a:latin typeface="Calibri"/>
+              </a:rPr>
+              <a:t>Kubeflow Pipelines — quvurlarni (ma'lumot tayyorlash → o'qitish → baholash → ro'yxatga olish) DAG sifatida aniqlash, har qadam alohida konteynerda, artefaktlar kuzatuvi va takroriy ishga tushirish bilan.</a:t>
+            </a:r>
+          </a:p>
         </p:txBody>
       </p:sp>
       <p:sp>
@@ -7880,12 +7925,12 @@
         </p:nvSpPr>
         <p:spPr>
           <a:xfrm>
-            <a:off x="550000" y="5102500"/>
-            <a:ext cx="11100000" cy="1147500"/>
+            <a:off x="550000" y="4974088"/>
+            <a:ext cx="11100000" cy="1034088"/>
           </a:xfrm>
           <a:prstGeom prst="roundRect">
             <a:avLst>
-              <a:gd name="adj" fmla="val 18000"/>
+              <a:gd name="adj" fmla="val 8000"/>
             </a:avLst>
           </a:prstGeom>
           <a:solidFill>
@@ -7926,8 +7971,8 @@
         </p:nvSpPr>
         <p:spPr>
           <a:xfrm>
-            <a:off x="550000" y="5102500"/>
-            <a:ext cx="70000" cy="1147500"/>
+            <a:off x="550000" y="4974088"/>
+            <a:ext cx="70000" cy="1034088"/>
           </a:xfrm>
           <a:prstGeom prst="rect">
             <a:avLst/>
@@ -7970,8 +8015,8 @@
         </p:nvSpPr>
         <p:spPr>
           <a:xfrm>
-            <a:off x="800000" y="5446250"/>
-            <a:ext cx="460000" cy="460000"/>
+            <a:off x="780000" y="5281132"/>
+            <a:ext cx="420000" cy="420000"/>
           </a:xfrm>
           <a:prstGeom prst="ellipse">
             <a:avLst/>
@@ -8004,7 +8049,7 @@
           <a:p>
             <a:pPr algn="ctr"/>
             <a:r>
-              <a:rPr sz="1600" b="1">
+              <a:rPr sz="1400" b="1">
                 <a:solidFill>
                   <a:srgbClr val="FFFFFF"/>
                 </a:solidFill>
@@ -8023,8 +8068,8 @@
         </p:nvSpPr>
         <p:spPr>
           <a:xfrm>
-            <a:off x="1450000" y="5102500"/>
-            <a:ext cx="10050000" cy="1147500"/>
+            <a:off x="1380000" y="5014088"/>
+            <a:ext cx="10150000" cy="954088"/>
           </a:xfrm>
           <a:prstGeom prst="rect">
             <a:avLst/>
@@ -8032,14 +8077,13 @@
           <a:noFill/>
         </p:spPr>
         <p:txBody>
-          <a:bodyPr wrap="square" anchor="ctr" lIns="50800" rIns="50800">
+          <a:bodyPr wrap="square" anchor="ctr">
             <a:spAutoFit/>
           </a:bodyPr>
           <a:lstStyle/>
           <a:p>
-            <a:pPr algn="l"/>
             <a:r>
-              <a:rPr sz="1600" b="0">
+              <a:rPr sz="1400" b="0">
                 <a:solidFill>
                   <a:srgbClr val="1B2430"/>
                 </a:solidFill>
@@ -11909,8 +11953,8 @@
         </p:nvSpPr>
         <p:spPr>
           <a:xfrm>
-            <a:off x="550000" y="2076666"/>
-            <a:ext cx="11100000" cy="1250000"/>
+            <a:off x="550000" y="3200000"/>
+            <a:ext cx="11100000" cy="520000"/>
           </a:xfrm>
           <a:prstGeom prst="roundRect">
             <a:avLst>
@@ -11955,8 +11999,8 @@
         </p:nvSpPr>
         <p:spPr>
           <a:xfrm>
-            <a:off x="550000" y="2076666"/>
-            <a:ext cx="70000" cy="1250000"/>
+            <a:off x="550000" y="3200000"/>
+            <a:ext cx="70000" cy="520000"/>
           </a:xfrm>
           <a:prstGeom prst="rect">
             <a:avLst/>
@@ -11999,8 +12043,8 @@
         </p:nvSpPr>
         <p:spPr>
           <a:xfrm>
-            <a:off x="800000" y="2471666"/>
-            <a:ext cx="460000" cy="460000"/>
+            <a:off x="780000" y="3270000"/>
+            <a:ext cx="380000" cy="380000"/>
           </a:xfrm>
           <a:prstGeom prst="ellipse">
             <a:avLst/>
@@ -12033,7 +12077,7 @@
           <a:p>
             <a:pPr algn="ctr"/>
             <a:r>
-              <a:rPr sz="1600" b="1">
+              <a:rPr sz="1400" b="1">
                 <a:solidFill>
                   <a:srgbClr val="FFFFFF"/>
                 </a:solidFill>
@@ -12052,8 +12096,8 @@
         </p:nvSpPr>
         <p:spPr>
           <a:xfrm>
-            <a:off x="1450000" y="2076666"/>
-            <a:ext cx="10050000" cy="1250000"/>
+            <a:off x="1380000" y="3240000"/>
+            <a:ext cx="10150000" cy="440000"/>
           </a:xfrm>
           <a:prstGeom prst="rect">
             <a:avLst/>
@@ -12061,12 +12105,11 @@
           <a:noFill/>
         </p:spPr>
         <p:txBody>
-          <a:bodyPr wrap="square" anchor="ctr" lIns="50800" rIns="50800">
+          <a:bodyPr wrap="square" anchor="ctr">
             <a:spAutoFit/>
           </a:bodyPr>
           <a:lstStyle/>
           <a:p>
-            <a:pPr algn="l"/>
             <a:r>
               <a:rPr sz="1600" b="0">
                 <a:solidFill>
@@ -12074,7 +12117,7 @@
                 </a:solidFill>
                 <a:latin typeface="Calibri"/>
               </a:rPr>
-              <a:t>M3 mavzusida ma'lumot, tensor va quvur parallelligi algoritmik jihatdan ko'rilgan edi; bu yerda ularning klaster darajasidagi talablari muhim. Taqsimlangan o'qitish ishi: (1) barcha ishchilar bir vaqtda joylanishi (gang scheduling); (2) ishchilar tarmoq…</a:t>
+              <a:t>M3 mavzusida ma'lumot, tensor va quvur parallelligi algoritmik jihatdan ko'rilgan edi; bu yerda ularning klaster darajasidagi talablari muhim.</a:t>
             </a:r>
           </a:p>
         </p:txBody>
@@ -12087,8 +12130,8 @@
         </p:nvSpPr>
         <p:spPr>
           <a:xfrm>
-            <a:off x="550000" y="3446666"/>
-            <a:ext cx="11100000" cy="1250000"/>
+            <a:off x="550000" y="3830000"/>
+            <a:ext cx="11100000" cy="520000"/>
           </a:xfrm>
           <a:prstGeom prst="roundRect">
             <a:avLst>
@@ -12133,8 +12176,8 @@
         </p:nvSpPr>
         <p:spPr>
           <a:xfrm>
-            <a:off x="550000" y="3446666"/>
-            <a:ext cx="70000" cy="1250000"/>
+            <a:off x="550000" y="3830000"/>
+            <a:ext cx="70000" cy="520000"/>
           </a:xfrm>
           <a:prstGeom prst="rect">
             <a:avLst/>
@@ -12177,8 +12220,8 @@
         </p:nvSpPr>
         <p:spPr>
           <a:xfrm>
-            <a:off x="800000" y="3841666"/>
-            <a:ext cx="460000" cy="460000"/>
+            <a:off x="780000" y="3900000"/>
+            <a:ext cx="380000" cy="380000"/>
           </a:xfrm>
           <a:prstGeom prst="ellipse">
             <a:avLst/>
@@ -12211,7 +12254,7 @@
           <a:p>
             <a:pPr algn="ctr"/>
             <a:r>
-              <a:rPr sz="1600" b="1">
+              <a:rPr sz="1400" b="1">
                 <a:solidFill>
                   <a:srgbClr val="FFFFFF"/>
                 </a:solidFill>
@@ -12230,8 +12273,8 @@
         </p:nvSpPr>
         <p:spPr>
           <a:xfrm>
-            <a:off x="1450000" y="3446666"/>
-            <a:ext cx="10050000" cy="1250000"/>
+            <a:off x="1380000" y="3870000"/>
+            <a:ext cx="10150000" cy="440000"/>
           </a:xfrm>
           <a:prstGeom prst="rect">
             <a:avLst/>
@@ -12239,12 +12282,11 @@
           <a:noFill/>
         </p:spPr>
         <p:txBody>
-          <a:bodyPr wrap="square" anchor="ctr" lIns="50800" rIns="50800">
+          <a:bodyPr wrap="square" anchor="ctr">
             <a:spAutoFit/>
           </a:bodyPr>
           <a:lstStyle/>
           <a:p>
-            <a:pPr algn="l"/>
             <a:r>
               <a:rPr sz="1600" b="0">
                 <a:solidFill>
@@ -12252,7 +12294,7 @@
                 </a:solidFill>
                 <a:latin typeface="Calibri"/>
               </a:rPr>
-              <a:t>Inferens xizmati esa boshqa talablar bilan: kechikish p99 va narx muvozanati; dinamik to'plash (dynamic batching) — bir necha millisekund ichida kelgan so'rovlarni bitta partiyaga yig'ish…</a:t>
+              <a:t>Inferens xizmati esa boshqa talablar bilan: kechikish p99 va narx muvozanati; dinamik to'plash (dynamic batching) — bir necha millisekund ichida kelgan so'rovlarni bitta partiyaga yig'ish (Triton, Ray Serve, vLLM'da continuous batching); bir GPU'da bir nechta…</a:t>
             </a:r>
           </a:p>
         </p:txBody>
@@ -14339,12 +14381,12 @@
         </p:nvSpPr>
         <p:spPr>
           <a:xfrm>
-            <a:off x="550000" y="2076666"/>
-            <a:ext cx="11100000" cy="1250000"/>
+            <a:off x="550000" y="2132700"/>
+            <a:ext cx="11100000" cy="1587300"/>
           </a:xfrm>
           <a:prstGeom prst="roundRect">
             <a:avLst>
-              <a:gd name="adj" fmla="val 18000"/>
+              <a:gd name="adj" fmla="val 8000"/>
             </a:avLst>
           </a:prstGeom>
           <a:solidFill>
@@ -14385,8 +14427,8 @@
         </p:nvSpPr>
         <p:spPr>
           <a:xfrm>
-            <a:off x="550000" y="2076666"/>
-            <a:ext cx="70000" cy="1250000"/>
+            <a:off x="550000" y="2132700"/>
+            <a:ext cx="70000" cy="1587300"/>
           </a:xfrm>
           <a:prstGeom prst="rect">
             <a:avLst/>
@@ -14429,8 +14471,8 @@
         </p:nvSpPr>
         <p:spPr>
           <a:xfrm>
-            <a:off x="800000" y="2471666"/>
-            <a:ext cx="460000" cy="460000"/>
+            <a:off x="780000" y="2716350"/>
+            <a:ext cx="420000" cy="420000"/>
           </a:xfrm>
           <a:prstGeom prst="ellipse">
             <a:avLst/>
@@ -14463,7 +14505,7 @@
           <a:p>
             <a:pPr algn="ctr"/>
             <a:r>
-              <a:rPr sz="1600" b="1">
+              <a:rPr sz="1400" b="1">
                 <a:solidFill>
                   <a:srgbClr val="FFFFFF"/>
                 </a:solidFill>
@@ -14482,8 +14524,8 @@
         </p:nvSpPr>
         <p:spPr>
           <a:xfrm>
-            <a:off x="1450000" y="2076666"/>
-            <a:ext cx="10050000" cy="1250000"/>
+            <a:off x="1380000" y="2172700"/>
+            <a:ext cx="10150000" cy="1507300"/>
           </a:xfrm>
           <a:prstGeom prst="rect">
             <a:avLst/>
@@ -14491,20 +14533,35 @@
           <a:noFill/>
         </p:spPr>
         <p:txBody>
-          <a:bodyPr wrap="square" anchor="ctr" lIns="50800" rIns="50800">
+          <a:bodyPr wrap="square" anchor="ctr">
             <a:spAutoFit/>
           </a:bodyPr>
           <a:lstStyle/>
           <a:p>
-            <a:pPr algn="l"/>
             <a:r>
-              <a:rPr sz="1600" b="0">
+              <a:rPr sz="1600" b="1">
                 <a:solidFill>
-                  <a:srgbClr val="1B2430"/>
+                  <a:srgbClr val="1F3A5F"/>
                 </a:solidFill>
                 <a:latin typeface="Calibri"/>
               </a:rPr>
-              <a:t>Loyihalashda to'rtta savol markaziy. Birinchisi — hisoblash birligi: bitta so'rov qancha GPU-millisekund oladi? Bundan narx (so'rov boshiga) va kerakli nusxa soni kelib chiqadi.</a:t>
+              <a:t>Loyihalashda to'rtta savol markaziy.</a:t>
+            </a:r>
+          </a:p>
+          <a:p>
+            <a:pPr>
+              <a:spcBef>
+                <a:spcPts val="400"/>
+              </a:spcBef>
+            </a:pPr>
+            <a:r>
+              <a:rPr sz="1500">
+                <a:solidFill>
+                  <a:srgbClr val="334055"/>
+                </a:solidFill>
+                <a:latin typeface="Calibri"/>
+              </a:rPr>
+              <a:t>Birinchisi — hisoblash birligi: bitta so'rov qancha GPU-millisekund oladi? Bundan narx (so'rov boshiga) va kerakli nusxa soni kelib chiqadi. Ikkinchisi — masshtablash signali va tezligi: GPU tugun 3 daqiqada ko'tariladi, demak kutilgan yuklama o'sishi oldindan prognoz qilinishi yoki zaxira nusxa saqlanishi kerak.</a:t>
             </a:r>
           </a:p>
         </p:txBody>
@@ -14517,12 +14574,12 @@
         </p:nvSpPr>
         <p:spPr>
           <a:xfrm>
-            <a:off x="550000" y="3446666"/>
-            <a:ext cx="11100000" cy="1250000"/>
+            <a:off x="550000" y="3830000"/>
+            <a:ext cx="11100000" cy="1587300"/>
           </a:xfrm>
           <a:prstGeom prst="roundRect">
             <a:avLst>
-              <a:gd name="adj" fmla="val 18000"/>
+              <a:gd name="adj" fmla="val 8000"/>
             </a:avLst>
           </a:prstGeom>
           <a:solidFill>
@@ -14563,8 +14620,8 @@
         </p:nvSpPr>
         <p:spPr>
           <a:xfrm>
-            <a:off x="550000" y="3446666"/>
-            <a:ext cx="70000" cy="1250000"/>
+            <a:off x="550000" y="3830000"/>
+            <a:ext cx="70000" cy="1587300"/>
           </a:xfrm>
           <a:prstGeom prst="rect">
             <a:avLst/>
@@ -14607,8 +14664,8 @@
         </p:nvSpPr>
         <p:spPr>
           <a:xfrm>
-            <a:off x="800000" y="3841666"/>
-            <a:ext cx="460000" cy="460000"/>
+            <a:off x="780000" y="4413650"/>
+            <a:ext cx="420000" cy="420000"/>
           </a:xfrm>
           <a:prstGeom prst="ellipse">
             <a:avLst/>
@@ -14641,7 +14698,7 @@
           <a:p>
             <a:pPr algn="ctr"/>
             <a:r>
-              <a:rPr sz="1600" b="1">
+              <a:rPr sz="1400" b="1">
                 <a:solidFill>
                   <a:srgbClr val="FFFFFF"/>
                 </a:solidFill>
@@ -14660,8 +14717,8 @@
         </p:nvSpPr>
         <p:spPr>
           <a:xfrm>
-            <a:off x="1450000" y="3446666"/>
-            <a:ext cx="10050000" cy="1250000"/>
+            <a:off x="1380000" y="3870000"/>
+            <a:ext cx="10150000" cy="1507300"/>
           </a:xfrm>
           <a:prstGeom prst="rect">
             <a:avLst/>
@@ -14669,20 +14726,35 @@
           <a:noFill/>
         </p:spPr>
         <p:txBody>
-          <a:bodyPr wrap="square" anchor="ctr" lIns="50800" rIns="50800">
+          <a:bodyPr wrap="square" anchor="ctr">
             <a:spAutoFit/>
           </a:bodyPr>
           <a:lstStyle/>
           <a:p>
-            <a:pPr algn="l"/>
             <a:r>
-              <a:rPr sz="1600" b="0">
+              <a:rPr sz="1600" b="1">
                 <a:solidFill>
-                  <a:srgbClr val="1B2430"/>
+                  <a:srgbClr val="1F3A5F"/>
                 </a:solidFill>
                 <a:latin typeface="Calibri"/>
               </a:rPr>
               <a:t>Narx optimallashtirishning amaliy vositalari: spot/preemptible instanslar o'qitish va paketli inferens uchun (60–90 foiz arzon, lekin to'satdan olib qo'yilishi mumkin — nazorat nuqtalari shart); MIG va time-slicing kichik modellar uchun; avtomatik…</a:t>
+            </a:r>
+          </a:p>
+          <a:p>
+            <a:pPr>
+              <a:spcBef>
+                <a:spcPts val="400"/>
+              </a:spcBef>
+            </a:pPr>
+            <a:r>
+              <a:rPr sz="1500">
+                <a:solidFill>
+                  <a:srgbClr val="334055"/>
+                </a:solidFill>
+                <a:latin typeface="Calibri"/>
+              </a:rPr>
+              <a:t>Energiya va uglerod izi ham tobora loyihalash mezoniga aylanmoqda: ma'lumot markazining PUE ko'rsatkichi, mintaqa tanlovi, yuklamani energiya arzon vaqtga siljitish.</a:t>
             </a:r>
           </a:p>
         </p:txBody>
@@ -16441,8 +16513,8 @@
         </p:nvSpPr>
         <p:spPr>
           <a:xfrm>
-            <a:off x="550000" y="1300000"/>
-            <a:ext cx="11100000" cy="725000"/>
+            <a:off x="550000" y="1940000"/>
+            <a:ext cx="11100000" cy="520000"/>
           </a:xfrm>
           <a:prstGeom prst="roundRect">
             <a:avLst>
@@ -16487,8 +16559,8 @@
         </p:nvSpPr>
         <p:spPr>
           <a:xfrm>
-            <a:off x="550000" y="1300000"/>
-            <a:ext cx="70000" cy="725000"/>
+            <a:off x="550000" y="1940000"/>
+            <a:ext cx="70000" cy="520000"/>
           </a:xfrm>
           <a:prstGeom prst="rect">
             <a:avLst/>
@@ -16531,8 +16603,8 @@
         </p:nvSpPr>
         <p:spPr>
           <a:xfrm>
-            <a:off x="800000" y="1432500"/>
-            <a:ext cx="460000" cy="460000"/>
+            <a:off x="780000" y="2010000"/>
+            <a:ext cx="380000" cy="380000"/>
           </a:xfrm>
           <a:prstGeom prst="ellipse">
             <a:avLst/>
@@ -16565,7 +16637,7 @@
           <a:p>
             <a:pPr algn="ctr"/>
             <a:r>
-              <a:rPr sz="1600" b="1">
+              <a:rPr sz="1400" b="1">
                 <a:solidFill>
                   <a:srgbClr val="FFFFFF"/>
                 </a:solidFill>
@@ -16584,8 +16656,8 @@
         </p:nvSpPr>
         <p:spPr>
           <a:xfrm>
-            <a:off x="1450000" y="1300000"/>
-            <a:ext cx="10050000" cy="725000"/>
+            <a:off x="1380000" y="1980000"/>
+            <a:ext cx="10150000" cy="440000"/>
           </a:xfrm>
           <a:prstGeom prst="rect">
             <a:avLst/>
@@ -16593,14 +16665,13 @@
           <a:noFill/>
         </p:spPr>
         <p:txBody>
-          <a:bodyPr wrap="square" anchor="ctr" lIns="50800" rIns="50800">
+          <a:bodyPr wrap="square" anchor="ctr">
             <a:spAutoFit/>
           </a:bodyPr>
           <a:lstStyle/>
           <a:p>
-            <a:pPr algn="l"/>
             <a:r>
-              <a:rPr sz="1900" b="0">
+              <a:rPr sz="1600" b="0">
                 <a:solidFill>
                   <a:srgbClr val="1B2430"/>
                 </a:solidFill>
@@ -16619,8 +16690,8 @@
         </p:nvSpPr>
         <p:spPr>
           <a:xfrm>
-            <a:off x="550000" y="2145000"/>
-            <a:ext cx="11100000" cy="725000"/>
+            <a:off x="550000" y="2570000"/>
+            <a:ext cx="11100000" cy="520000"/>
           </a:xfrm>
           <a:prstGeom prst="roundRect">
             <a:avLst>
@@ -16665,8 +16736,8 @@
         </p:nvSpPr>
         <p:spPr>
           <a:xfrm>
-            <a:off x="550000" y="2145000"/>
-            <a:ext cx="70000" cy="725000"/>
+            <a:off x="550000" y="2570000"/>
+            <a:ext cx="70000" cy="520000"/>
           </a:xfrm>
           <a:prstGeom prst="rect">
             <a:avLst/>
@@ -16709,8 +16780,8 @@
         </p:nvSpPr>
         <p:spPr>
           <a:xfrm>
-            <a:off x="800000" y="2277500"/>
-            <a:ext cx="460000" cy="460000"/>
+            <a:off x="780000" y="2640000"/>
+            <a:ext cx="380000" cy="380000"/>
           </a:xfrm>
           <a:prstGeom prst="ellipse">
             <a:avLst/>
@@ -16743,7 +16814,7 @@
           <a:p>
             <a:pPr algn="ctr"/>
             <a:r>
-              <a:rPr sz="1600" b="1">
+              <a:rPr sz="1400" b="1">
                 <a:solidFill>
                   <a:srgbClr val="FFFFFF"/>
                 </a:solidFill>
@@ -16762,8 +16833,8 @@
         </p:nvSpPr>
         <p:spPr>
           <a:xfrm>
-            <a:off x="1450000" y="2145000"/>
-            <a:ext cx="10050000" cy="725000"/>
+            <a:off x="1380000" y="2610000"/>
+            <a:ext cx="10150000" cy="440000"/>
           </a:xfrm>
           <a:prstGeom prst="rect">
             <a:avLst/>
@@ -16771,14 +16842,13 @@
           <a:noFill/>
         </p:spPr>
         <p:txBody>
-          <a:bodyPr wrap="square" anchor="ctr" lIns="50800" rIns="50800">
+          <a:bodyPr wrap="square" anchor="ctr">
             <a:spAutoFit/>
           </a:bodyPr>
           <a:lstStyle/>
           <a:p>
-            <a:pPr algn="l"/>
             <a:r>
-              <a:rPr sz="1900" b="0">
+              <a:rPr sz="1600" b="0">
                 <a:solidFill>
                   <a:srgbClr val="1B2430"/>
                 </a:solidFill>
@@ -16797,8 +16867,8 @@
         </p:nvSpPr>
         <p:spPr>
           <a:xfrm>
-            <a:off x="550000" y="2990000"/>
-            <a:ext cx="11100000" cy="725000"/>
+            <a:off x="550000" y="3200000"/>
+            <a:ext cx="11100000" cy="520000"/>
           </a:xfrm>
           <a:prstGeom prst="roundRect">
             <a:avLst>
@@ -16843,8 +16913,8 @@
         </p:nvSpPr>
         <p:spPr>
           <a:xfrm>
-            <a:off x="550000" y="2990000"/>
-            <a:ext cx="70000" cy="725000"/>
+            <a:off x="550000" y="3200000"/>
+            <a:ext cx="70000" cy="520000"/>
           </a:xfrm>
           <a:prstGeom prst="rect">
             <a:avLst/>
@@ -16887,8 +16957,8 @@
         </p:nvSpPr>
         <p:spPr>
           <a:xfrm>
-            <a:off x="800000" y="3122500"/>
-            <a:ext cx="460000" cy="460000"/>
+            <a:off x="780000" y="3270000"/>
+            <a:ext cx="380000" cy="380000"/>
           </a:xfrm>
           <a:prstGeom prst="ellipse">
             <a:avLst/>
@@ -16921,7 +16991,7 @@
           <a:p>
             <a:pPr algn="ctr"/>
             <a:r>
-              <a:rPr sz="1600" b="1">
+              <a:rPr sz="1400" b="1">
                 <a:solidFill>
                   <a:srgbClr val="FFFFFF"/>
                 </a:solidFill>
@@ -16940,8 +17010,8 @@
         </p:nvSpPr>
         <p:spPr>
           <a:xfrm>
-            <a:off x="1450000" y="2990000"/>
-            <a:ext cx="10050000" cy="725000"/>
+            <a:off x="1380000" y="3240000"/>
+            <a:ext cx="10150000" cy="440000"/>
           </a:xfrm>
           <a:prstGeom prst="rect">
             <a:avLst/>
@@ -16949,14 +17019,13 @@
           <a:noFill/>
         </p:spPr>
         <p:txBody>
-          <a:bodyPr wrap="square" anchor="ctr" lIns="50800" rIns="50800">
+          <a:bodyPr wrap="square" anchor="ctr">
             <a:spAutoFit/>
           </a:bodyPr>
           <a:lstStyle/>
           <a:p>
-            <a:pPr algn="l"/>
             <a:r>
-              <a:rPr sz="1900" b="0">
+              <a:rPr sz="1600" b="0">
                 <a:solidFill>
                   <a:srgbClr val="1B2430"/>
                 </a:solidFill>
@@ -16975,8 +17044,8 @@
         </p:nvSpPr>
         <p:spPr>
           <a:xfrm>
-            <a:off x="550000" y="3835000"/>
-            <a:ext cx="11100000" cy="725000"/>
+            <a:off x="550000" y="3830000"/>
+            <a:ext cx="11100000" cy="520000"/>
           </a:xfrm>
           <a:prstGeom prst="roundRect">
             <a:avLst>
@@ -17021,8 +17090,8 @@
         </p:nvSpPr>
         <p:spPr>
           <a:xfrm>
-            <a:off x="550000" y="3835000"/>
-            <a:ext cx="70000" cy="725000"/>
+            <a:off x="550000" y="3830000"/>
+            <a:ext cx="70000" cy="520000"/>
           </a:xfrm>
           <a:prstGeom prst="rect">
             <a:avLst/>
@@ -17065,8 +17134,8 @@
         </p:nvSpPr>
         <p:spPr>
           <a:xfrm>
-            <a:off x="800000" y="3967500"/>
-            <a:ext cx="460000" cy="460000"/>
+            <a:off x="780000" y="3900000"/>
+            <a:ext cx="380000" cy="380000"/>
           </a:xfrm>
           <a:prstGeom prst="ellipse">
             <a:avLst/>
@@ -17099,7 +17168,7 @@
           <a:p>
             <a:pPr algn="ctr"/>
             <a:r>
-              <a:rPr sz="1600" b="1">
+              <a:rPr sz="1400" b="1">
                 <a:solidFill>
                   <a:srgbClr val="FFFFFF"/>
                 </a:solidFill>
@@ -17118,8 +17187,8 @@
         </p:nvSpPr>
         <p:spPr>
           <a:xfrm>
-            <a:off x="1450000" y="3835000"/>
-            <a:ext cx="10050000" cy="725000"/>
+            <a:off x="1380000" y="3870000"/>
+            <a:ext cx="10150000" cy="440000"/>
           </a:xfrm>
           <a:prstGeom prst="rect">
             <a:avLst/>
@@ -17127,14 +17196,13 @@
           <a:noFill/>
         </p:spPr>
         <p:txBody>
-          <a:bodyPr wrap="square" anchor="ctr" lIns="50800" rIns="50800">
+          <a:bodyPr wrap="square" anchor="ctr">
             <a:spAutoFit/>
           </a:bodyPr>
           <a:lstStyle/>
           <a:p>
-            <a:pPr algn="l"/>
             <a:r>
-              <a:rPr sz="1900" b="0">
+              <a:rPr sz="1600" b="0">
                 <a:solidFill>
                   <a:srgbClr val="1B2430"/>
                 </a:solidFill>
@@ -17153,8 +17221,8 @@
         </p:nvSpPr>
         <p:spPr>
           <a:xfrm>
-            <a:off x="550000" y="4680000"/>
-            <a:ext cx="11100000" cy="725000"/>
+            <a:off x="550000" y="4460000"/>
+            <a:ext cx="11100000" cy="520000"/>
           </a:xfrm>
           <a:prstGeom prst="roundRect">
             <a:avLst>
@@ -17199,8 +17267,8 @@
         </p:nvSpPr>
         <p:spPr>
           <a:xfrm>
-            <a:off x="550000" y="4680000"/>
-            <a:ext cx="70000" cy="725000"/>
+            <a:off x="550000" y="4460000"/>
+            <a:ext cx="70000" cy="520000"/>
           </a:xfrm>
           <a:prstGeom prst="rect">
             <a:avLst/>
@@ -17243,8 +17311,8 @@
         </p:nvSpPr>
         <p:spPr>
           <a:xfrm>
-            <a:off x="800000" y="4812500"/>
-            <a:ext cx="460000" cy="460000"/>
+            <a:off x="780000" y="4530000"/>
+            <a:ext cx="380000" cy="380000"/>
           </a:xfrm>
           <a:prstGeom prst="ellipse">
             <a:avLst/>
@@ -17277,7 +17345,7 @@
           <a:p>
             <a:pPr algn="ctr"/>
             <a:r>
-              <a:rPr sz="1600" b="1">
+              <a:rPr sz="1400" b="1">
                 <a:solidFill>
                   <a:srgbClr val="FFFFFF"/>
                 </a:solidFill>
@@ -17296,8 +17364,8 @@
         </p:nvSpPr>
         <p:spPr>
           <a:xfrm>
-            <a:off x="1450000" y="4680000"/>
-            <a:ext cx="10050000" cy="725000"/>
+            <a:off x="1380000" y="4500000"/>
+            <a:ext cx="10150000" cy="440000"/>
           </a:xfrm>
           <a:prstGeom prst="rect">
             <a:avLst/>
@@ -17305,14 +17373,13 @@
           <a:noFill/>
         </p:spPr>
         <p:txBody>
-          <a:bodyPr wrap="square" anchor="ctr" lIns="50800" rIns="50800">
+          <a:bodyPr wrap="square" anchor="ctr">
             <a:spAutoFit/>
           </a:bodyPr>
           <a:lstStyle/>
           <a:p>
-            <a:pPr algn="l"/>
             <a:r>
-              <a:rPr sz="1900" b="0">
+              <a:rPr sz="1600" b="0">
                 <a:solidFill>
                   <a:srgbClr val="1B2430"/>
                 </a:solidFill>
@@ -17331,8 +17398,8 @@
         </p:nvSpPr>
         <p:spPr>
           <a:xfrm>
-            <a:off x="550000" y="5525000"/>
-            <a:ext cx="11100000" cy="725000"/>
+            <a:off x="550000" y="5090000"/>
+            <a:ext cx="11100000" cy="520000"/>
           </a:xfrm>
           <a:prstGeom prst="roundRect">
             <a:avLst>
@@ -17377,8 +17444,8 @@
         </p:nvSpPr>
         <p:spPr>
           <a:xfrm>
-            <a:off x="550000" y="5525000"/>
-            <a:ext cx="70000" cy="725000"/>
+            <a:off x="550000" y="5090000"/>
+            <a:ext cx="70000" cy="520000"/>
           </a:xfrm>
           <a:prstGeom prst="rect">
             <a:avLst/>
@@ -17421,8 +17488,8 @@
         </p:nvSpPr>
         <p:spPr>
           <a:xfrm>
-            <a:off x="800000" y="5657500"/>
-            <a:ext cx="460000" cy="460000"/>
+            <a:off x="780000" y="5160000"/>
+            <a:ext cx="380000" cy="380000"/>
           </a:xfrm>
           <a:prstGeom prst="ellipse">
             <a:avLst/>
@@ -17455,7 +17522,7 @@
           <a:p>
             <a:pPr algn="ctr"/>
             <a:r>
-              <a:rPr sz="1600" b="1">
+              <a:rPr sz="1400" b="1">
                 <a:solidFill>
                   <a:srgbClr val="FFFFFF"/>
                 </a:solidFill>
@@ -17474,8 +17541,8 @@
         </p:nvSpPr>
         <p:spPr>
           <a:xfrm>
-            <a:off x="1450000" y="5525000"/>
-            <a:ext cx="10050000" cy="725000"/>
+            <a:off x="1380000" y="5130000"/>
+            <a:ext cx="10150000" cy="440000"/>
           </a:xfrm>
           <a:prstGeom prst="rect">
             <a:avLst/>
@@ -17483,14 +17550,13 @@
           <a:noFill/>
         </p:spPr>
         <p:txBody>
-          <a:bodyPr wrap="square" anchor="ctr" lIns="50800" rIns="50800">
+          <a:bodyPr wrap="square" anchor="ctr">
             <a:spAutoFit/>
           </a:bodyPr>
           <a:lstStyle/>
           <a:p>
-            <a:pPr algn="l"/>
             <a:r>
-              <a:rPr sz="1900" b="0">
+              <a:rPr sz="1600" b="0">
                 <a:solidFill>
                   <a:srgbClr val="1B2430"/>
                 </a:solidFill>
@@ -21039,12 +21105,12 @@
         </p:nvSpPr>
         <p:spPr>
           <a:xfrm>
-            <a:off x="550000" y="2076666"/>
-            <a:ext cx="11100000" cy="1250000"/>
+            <a:off x="550000" y="2384160"/>
+            <a:ext cx="11100000" cy="1335840"/>
           </a:xfrm>
           <a:prstGeom prst="roundRect">
             <a:avLst>
-              <a:gd name="adj" fmla="val 18000"/>
+              <a:gd name="adj" fmla="val 8000"/>
             </a:avLst>
           </a:prstGeom>
           <a:solidFill>
@@ -21085,8 +21151,8 @@
         </p:nvSpPr>
         <p:spPr>
           <a:xfrm>
-            <a:off x="550000" y="2076666"/>
-            <a:ext cx="70000" cy="1250000"/>
+            <a:off x="550000" y="2384160"/>
+            <a:ext cx="70000" cy="1335840"/>
           </a:xfrm>
           <a:prstGeom prst="rect">
             <a:avLst/>
@@ -21129,8 +21195,8 @@
         </p:nvSpPr>
         <p:spPr>
           <a:xfrm>
-            <a:off x="800000" y="2471666"/>
-            <a:ext cx="460000" cy="460000"/>
+            <a:off x="780000" y="2842080"/>
+            <a:ext cx="420000" cy="420000"/>
           </a:xfrm>
           <a:prstGeom prst="ellipse">
             <a:avLst/>
@@ -21163,7 +21229,7 @@
           <a:p>
             <a:pPr algn="ctr"/>
             <a:r>
-              <a:rPr sz="1600" b="1">
+              <a:rPr sz="1400" b="1">
                 <a:solidFill>
                   <a:srgbClr val="FFFFFF"/>
                 </a:solidFill>
@@ -21182,8 +21248,8 @@
         </p:nvSpPr>
         <p:spPr>
           <a:xfrm>
-            <a:off x="1450000" y="2076666"/>
-            <a:ext cx="10050000" cy="1250000"/>
+            <a:off x="1380000" y="2424160"/>
+            <a:ext cx="10150000" cy="1255840"/>
           </a:xfrm>
           <a:prstGeom prst="rect">
             <a:avLst/>
@@ -21191,20 +21257,35 @@
           <a:noFill/>
         </p:spPr>
         <p:txBody>
-          <a:bodyPr wrap="square" anchor="ctr" lIns="50800" rIns="50800">
+          <a:bodyPr wrap="square" anchor="ctr">
             <a:spAutoFit/>
           </a:bodyPr>
           <a:lstStyle/>
           <a:p>
-            <a:pPr algn="l"/>
             <a:r>
-              <a:rPr sz="1600" b="0">
+              <a:rPr sz="1600" b="1">
                 <a:solidFill>
-                  <a:srgbClr val="1B2430"/>
+                  <a:srgbClr val="1F3A5F"/>
                 </a:solidFill>
                 <a:latin typeface="Calibri"/>
               </a:rPr>
-              <a:t>Bulutli sun'iy intellekt infratuzilmasini besh qatlamli stek sifatida tasavvur qilish qulay. Eng pastda — fizik apparat: GPU serverlari (masalan, 8× H100 yoki B200 NVLink bilan), yuqori tezlikli tarmoq (InfiniBand NDR 400 Gb/s yoki RoCE Ethernet), parallel…</a:t>
+              <a:t>Bulutli sun'iy intellekt infratuzilmasini besh qatlamli stek sifatida tasavvur qilish qulay.</a:t>
+            </a:r>
+          </a:p>
+          <a:p>
+            <a:pPr>
+              <a:spcBef>
+                <a:spcPts val="400"/>
+              </a:spcBef>
+            </a:pPr>
+            <a:r>
+              <a:rPr sz="1500">
+                <a:solidFill>
+                  <a:srgbClr val="334055"/>
+                </a:solidFill>
+                <a:latin typeface="Calibri"/>
+              </a:rPr>
+              <a:t>Eng pastda — fizik apparat: GPU serverlari (masalan, 8× H100 yoki B200 NVLink bilan), yuqori tezlikli tarmoq (InfiniBand NDR 400 Gb/s yoki RoCE Ethernet), parallel saqlash tizimlari (Lustre, GPFS, obyekt saqlash S3).</a:t>
             </a:r>
           </a:p>
         </p:txBody>
@@ -21217,12 +21298,12 @@
         </p:nvSpPr>
         <p:spPr>
           <a:xfrm>
-            <a:off x="550000" y="3446666"/>
-            <a:ext cx="11100000" cy="1250000"/>
+            <a:off x="550000" y="3830000"/>
+            <a:ext cx="11100000" cy="1335840"/>
           </a:xfrm>
           <a:prstGeom prst="roundRect">
             <a:avLst>
-              <a:gd name="adj" fmla="val 18000"/>
+              <a:gd name="adj" fmla="val 8000"/>
             </a:avLst>
           </a:prstGeom>
           <a:solidFill>
@@ -21263,8 +21344,8 @@
         </p:nvSpPr>
         <p:spPr>
           <a:xfrm>
-            <a:off x="550000" y="3446666"/>
-            <a:ext cx="70000" cy="1250000"/>
+            <a:off x="550000" y="3830000"/>
+            <a:ext cx="70000" cy="1335840"/>
           </a:xfrm>
           <a:prstGeom prst="rect">
             <a:avLst/>
@@ -21307,8 +21388,8 @@
         </p:nvSpPr>
         <p:spPr>
           <a:xfrm>
-            <a:off x="800000" y="3841666"/>
-            <a:ext cx="460000" cy="460000"/>
+            <a:off x="780000" y="4287920"/>
+            <a:ext cx="420000" cy="420000"/>
           </a:xfrm>
           <a:prstGeom prst="ellipse">
             <a:avLst/>
@@ -21341,7 +21422,7 @@
           <a:p>
             <a:pPr algn="ctr"/>
             <a:r>
-              <a:rPr sz="1600" b="1">
+              <a:rPr sz="1400" b="1">
                 <a:solidFill>
                   <a:srgbClr val="FFFFFF"/>
                 </a:solidFill>
@@ -21360,8 +21441,8 @@
         </p:nvSpPr>
         <p:spPr>
           <a:xfrm>
-            <a:off x="1450000" y="3446666"/>
-            <a:ext cx="10050000" cy="1250000"/>
+            <a:off x="1380000" y="3870000"/>
+            <a:ext cx="10150000" cy="1255840"/>
           </a:xfrm>
           <a:prstGeom prst="rect">
             <a:avLst/>
@@ -21369,20 +21450,35 @@
           <a:noFill/>
         </p:spPr>
         <p:txBody>
-          <a:bodyPr wrap="square" anchor="ctr" lIns="50800" rIns="50800">
+          <a:bodyPr wrap="square" anchor="ctr">
             <a:spAutoFit/>
           </a:bodyPr>
           <a:lstStyle/>
           <a:p>
-            <a:pPr algn="l"/>
             <a:r>
-              <a:rPr sz="1600" b="0">
+              <a:rPr sz="1600" b="1">
                 <a:solidFill>
-                  <a:srgbClr val="1B2430"/>
+                  <a:srgbClr val="1F3A5F"/>
                 </a:solidFill>
                 <a:latin typeface="Calibri"/>
               </a:rPr>
-              <a:t>Xizmat modellari nuqtai nazaridan AI bulutida uchta daraja farqlanadi. IaaS (Infrastructure as a Service) — GPU'li virtual mashina ijarasi (AWS p5, GCP A3, Azure ND H100 v5 instanslari yoki ixtisoslashgan GPU bulutlari); muhandis to'liq nazoratga ega, lekin…</a:t>
+              <a:t>Xizmat modellari nuqtai nazaridan AI bulutida uchta daraja farqlanadi.</a:t>
+            </a:r>
+          </a:p>
+          <a:p>
+            <a:pPr>
+              <a:spcBef>
+                <a:spcPts val="400"/>
+              </a:spcBef>
+            </a:pPr>
+            <a:r>
+              <a:rPr sz="1500">
+                <a:solidFill>
+                  <a:srgbClr val="334055"/>
+                </a:solidFill>
+                <a:latin typeface="Calibri"/>
+              </a:rPr>
+              <a:t>IaaS (Infrastructure as a Service) — GPU'li virtual mashina ijarasi (AWS p5, GCP A3, Azure ND H100 v5 instanslari yoki ixtisoslashgan GPU bulutlari); muhandis to'liq nazoratga ega, lekin hamma narsani o'zi sozlaydi.</a:t>
             </a:r>
           </a:p>
         </p:txBody>
@@ -23469,12 +23565,12 @@
         </p:nvSpPr>
         <p:spPr>
           <a:xfrm>
-            <a:off x="550000" y="1620000"/>
-            <a:ext cx="11100000" cy="1250000"/>
+            <a:off x="550000" y="1761824"/>
+            <a:ext cx="11100000" cy="1268784"/>
           </a:xfrm>
           <a:prstGeom prst="roundRect">
             <a:avLst>
-              <a:gd name="adj" fmla="val 18000"/>
+              <a:gd name="adj" fmla="val 8000"/>
             </a:avLst>
           </a:prstGeom>
           <a:solidFill>
@@ -23515,8 +23611,8 @@
         </p:nvSpPr>
         <p:spPr>
           <a:xfrm>
-            <a:off x="550000" y="1620000"/>
-            <a:ext cx="70000" cy="1250000"/>
+            <a:off x="550000" y="1761824"/>
+            <a:ext cx="70000" cy="1268784"/>
           </a:xfrm>
           <a:prstGeom prst="rect">
             <a:avLst/>
@@ -23559,8 +23655,8 @@
         </p:nvSpPr>
         <p:spPr>
           <a:xfrm>
-            <a:off x="800000" y="2015000"/>
-            <a:ext cx="460000" cy="460000"/>
+            <a:off x="780000" y="2186216"/>
+            <a:ext cx="420000" cy="420000"/>
           </a:xfrm>
           <a:prstGeom prst="ellipse">
             <a:avLst/>
@@ -23593,7 +23689,7 @@
           <a:p>
             <a:pPr algn="ctr"/>
             <a:r>
-              <a:rPr sz="1600" b="1">
+              <a:rPr sz="1400" b="1">
                 <a:solidFill>
                   <a:srgbClr val="FFFFFF"/>
                 </a:solidFill>
@@ -23612,8 +23708,8 @@
         </p:nvSpPr>
         <p:spPr>
           <a:xfrm>
-            <a:off x="1450000" y="1620000"/>
-            <a:ext cx="10050000" cy="1250000"/>
+            <a:off x="1380000" y="1801824"/>
+            <a:ext cx="10150000" cy="1188784"/>
           </a:xfrm>
           <a:prstGeom prst="rect">
             <a:avLst/>
@@ -23621,20 +23717,35 @@
           <a:noFill/>
         </p:spPr>
         <p:txBody>
-          <a:bodyPr wrap="square" anchor="ctr" lIns="50800" rIns="50800">
+          <a:bodyPr wrap="square" anchor="ctr">
             <a:spAutoFit/>
           </a:bodyPr>
           <a:lstStyle/>
           <a:p>
-            <a:pPr algn="l"/>
             <a:r>
-              <a:rPr sz="1600" b="0">
+              <a:rPr sz="1500" b="1">
                 <a:solidFill>
-                  <a:srgbClr val="1B2430"/>
+                  <a:srgbClr val="1F3A5F"/>
                 </a:solidFill>
                 <a:latin typeface="Calibri"/>
               </a:rPr>
-              <a:t>Sun'iy intellekt dasturiy ta'minotining eng og'riqli muammolaridan biri — muhit mosligi: CUDA versiyasi, drayver, cuDNN, PyTorch g'ildiragi, Python paketlari o'rtasidagi bog'liqliklar. «Mening kompyuterimda ishlaydi» holati GPU dasturlarida ayniqsa ko'p…</a:t>
+              <a:t>Sun'iy intellekt dasturiy ta'minotining eng og'riqli muammolaridan biri — muhit mosligi: CUDA versiyasi, drayver, cuDNN, PyTorch g'ildiragi, Python paketlari o'rtasidagi bog'liqliklar.</a:t>
+            </a:r>
+          </a:p>
+          <a:p>
+            <a:pPr>
+              <a:spcBef>
+                <a:spcPts val="400"/>
+              </a:spcBef>
+            </a:pPr>
+            <a:r>
+              <a:rPr sz="1400">
+                <a:solidFill>
+                  <a:srgbClr val="334055"/>
+                </a:solidFill>
+                <a:latin typeface="Calibri"/>
+              </a:rPr>
+              <a:t>«Mening kompyuterimda ishlaydi» holati GPU dasturlarida ayniqsa ko'p uchraydi.</a:t>
             </a:r>
           </a:p>
         </p:txBody>
@@ -23647,12 +23758,12 @@
         </p:nvSpPr>
         <p:spPr>
           <a:xfrm>
-            <a:off x="550000" y="2990000"/>
-            <a:ext cx="11100000" cy="1250000"/>
+            <a:off x="550000" y="3140608"/>
+            <a:ext cx="11100000" cy="1268784"/>
           </a:xfrm>
           <a:prstGeom prst="roundRect">
             <a:avLst>
-              <a:gd name="adj" fmla="val 18000"/>
+              <a:gd name="adj" fmla="val 8000"/>
             </a:avLst>
           </a:prstGeom>
           <a:solidFill>
@@ -23693,8 +23804,8 @@
         </p:nvSpPr>
         <p:spPr>
           <a:xfrm>
-            <a:off x="550000" y="2990000"/>
-            <a:ext cx="70000" cy="1250000"/>
+            <a:off x="550000" y="3140608"/>
+            <a:ext cx="70000" cy="1268784"/>
           </a:xfrm>
           <a:prstGeom prst="rect">
             <a:avLst/>
@@ -23737,8 +23848,8 @@
         </p:nvSpPr>
         <p:spPr>
           <a:xfrm>
-            <a:off x="800000" y="3385000"/>
-            <a:ext cx="460000" cy="460000"/>
+            <a:off x="780000" y="3565000"/>
+            <a:ext cx="420000" cy="420000"/>
           </a:xfrm>
           <a:prstGeom prst="ellipse">
             <a:avLst/>
@@ -23771,7 +23882,7 @@
           <a:p>
             <a:pPr algn="ctr"/>
             <a:r>
-              <a:rPr sz="1600" b="1">
+              <a:rPr sz="1400" b="1">
                 <a:solidFill>
                   <a:srgbClr val="FFFFFF"/>
                 </a:solidFill>
@@ -23790,8 +23901,8 @@
         </p:nvSpPr>
         <p:spPr>
           <a:xfrm>
-            <a:off x="1450000" y="2990000"/>
-            <a:ext cx="10050000" cy="1250000"/>
+            <a:off x="1380000" y="3180608"/>
+            <a:ext cx="10150000" cy="1188784"/>
           </a:xfrm>
           <a:prstGeom prst="rect">
             <a:avLst/>
@@ -23799,20 +23910,35 @@
           <a:noFill/>
         </p:spPr>
         <p:txBody>
-          <a:bodyPr wrap="square" anchor="ctr" lIns="50800" rIns="50800">
+          <a:bodyPr wrap="square" anchor="ctr">
             <a:spAutoFit/>
           </a:bodyPr>
           <a:lstStyle/>
           <a:p>
-            <a:pPr algn="l"/>
             <a:r>
-              <a:rPr sz="1600" b="0">
+              <a:rPr sz="1500" b="1">
                 <a:solidFill>
-                  <a:srgbClr val="1B2430"/>
+                  <a:srgbClr val="1F3A5F"/>
                 </a:solidFill>
                 <a:latin typeface="Calibri"/>
               </a:rPr>
-              <a:t>Docker obrazi qatlamlardan (layers) iborat: Dockerfile'dagi har bir RUN, COPY buyrug'i yangi faqat-o'qish qatlami yaratadi; qatlamlar keshlanadi va obrazlar orasida umumiy bo'ladi. Shuning uchun Dockerfile tartibi muhim: kamdan-kam o'zgaradigan buyruqlar…</a:t>
+              <a:t>Docker obrazi qatlamlardan (layers) iborat: Dockerfile'dagi har bir RUN, COPY buyrug'i yangi faqat-o'qish qatlami yaratadi; qatlamlar keshlanadi va obrazlar orasida umumiy bo'ladi.</a:t>
+            </a:r>
+          </a:p>
+          <a:p>
+            <a:pPr>
+              <a:spcBef>
+                <a:spcPts val="400"/>
+              </a:spcBef>
+            </a:pPr>
+            <a:r>
+              <a:rPr sz="1400">
+                <a:solidFill>
+                  <a:srgbClr val="334055"/>
+                </a:solidFill>
+                <a:latin typeface="Calibri"/>
+              </a:rPr>
+              <a:t>Shuning uchun Dockerfile tartibi muhim: kamdan-kam o'zgaradigan buyruqlar (bazaviy obraz, tizim paketlari, og'ir Python kutubxonalari) tepada, tez-tez o'zgaradigan kod pastda bo'lsa, qayta qurish tez bo'ladi.</a:t>
             </a:r>
           </a:p>
         </p:txBody>
@@ -23825,12 +23951,12 @@
         </p:nvSpPr>
         <p:spPr>
           <a:xfrm>
-            <a:off x="550000" y="4360000"/>
-            <a:ext cx="11100000" cy="1250000"/>
+            <a:off x="550000" y="4519392"/>
+            <a:ext cx="11100000" cy="1268784"/>
           </a:xfrm>
           <a:prstGeom prst="roundRect">
             <a:avLst>
-              <a:gd name="adj" fmla="val 18000"/>
+              <a:gd name="adj" fmla="val 8000"/>
             </a:avLst>
           </a:prstGeom>
           <a:solidFill>
@@ -23871,8 +23997,8 @@
         </p:nvSpPr>
         <p:spPr>
           <a:xfrm>
-            <a:off x="550000" y="4360000"/>
-            <a:ext cx="70000" cy="1250000"/>
+            <a:off x="550000" y="4519392"/>
+            <a:ext cx="70000" cy="1268784"/>
           </a:xfrm>
           <a:prstGeom prst="rect">
             <a:avLst/>
@@ -23915,8 +24041,8 @@
         </p:nvSpPr>
         <p:spPr>
           <a:xfrm>
-            <a:off x="800000" y="4755000"/>
-            <a:ext cx="460000" cy="460000"/>
+            <a:off x="780000" y="4943784"/>
+            <a:ext cx="420000" cy="420000"/>
           </a:xfrm>
           <a:prstGeom prst="ellipse">
             <a:avLst/>
@@ -23949,7 +24075,7 @@
           <a:p>
             <a:pPr algn="ctr"/>
             <a:r>
-              <a:rPr sz="1600" b="1">
+              <a:rPr sz="1400" b="1">
                 <a:solidFill>
                   <a:srgbClr val="FFFFFF"/>
                 </a:solidFill>
@@ -23968,8 +24094,8 @@
         </p:nvSpPr>
         <p:spPr>
           <a:xfrm>
-            <a:off x="1450000" y="4360000"/>
-            <a:ext cx="10050000" cy="1250000"/>
+            <a:off x="1380000" y="4559392"/>
+            <a:ext cx="10150000" cy="1188784"/>
           </a:xfrm>
           <a:prstGeom prst="rect">
             <a:avLst/>
@@ -23977,20 +24103,19 @@
           <a:noFill/>
         </p:spPr>
         <p:txBody>
-          <a:bodyPr wrap="square" anchor="ctr" lIns="50800" rIns="50800">
+          <a:bodyPr wrap="square" anchor="ctr">
             <a:spAutoFit/>
           </a:bodyPr>
           <a:lstStyle/>
           <a:p>
-            <a:pPr algn="l"/>
             <a:r>
-              <a:rPr sz="1600" b="0">
+              <a:rPr sz="1400" b="0">
                 <a:solidFill>
                   <a:srgbClr val="1B2430"/>
                 </a:solidFill>
                 <a:latin typeface="Calibri"/>
               </a:rPr>
-              <a:t>Yaxshi inferens obrazining belgilari: ko'p bosqichli qurilish (multi-stage build) — kompilyatsiya vositalari yakuniy obrazga kirmaydi; aniq versiyalar (torch==2.4.1, ma'lum CUDA bilan);…</a:t>
+              <a:t>Yaxshi inferens obrazining belgilari: ko'p bosqichli qurilish (multi-stage build) — kompilyatsiya vositalari yakuniy obrazga kirmaydi; aniq versiyalar (torch==2.4.1, ma'lum CUDA bilan); ildiz bo'lmagan foydalanuvchi; sog'liqni tekshirish (healthcheck)…</a:t>
             </a:r>
           </a:p>
         </p:txBody>
@@ -26441,12 +26566,12 @@
         </p:nvSpPr>
         <p:spPr>
           <a:xfrm>
-            <a:off x="550000" y="1620000"/>
-            <a:ext cx="11100000" cy="1250000"/>
+            <a:off x="550000" y="1409780"/>
+            <a:ext cx="11100000" cy="1503480"/>
           </a:xfrm>
           <a:prstGeom prst="roundRect">
             <a:avLst>
-              <a:gd name="adj" fmla="val 18000"/>
+              <a:gd name="adj" fmla="val 8000"/>
             </a:avLst>
           </a:prstGeom>
           <a:solidFill>
@@ -26487,8 +26612,8 @@
         </p:nvSpPr>
         <p:spPr>
           <a:xfrm>
-            <a:off x="550000" y="1620000"/>
-            <a:ext cx="70000" cy="1250000"/>
+            <a:off x="550000" y="1409780"/>
+            <a:ext cx="70000" cy="1503480"/>
           </a:xfrm>
           <a:prstGeom prst="rect">
             <a:avLst/>
@@ -26531,8 +26656,8 @@
         </p:nvSpPr>
         <p:spPr>
           <a:xfrm>
-            <a:off x="800000" y="2015000"/>
-            <a:ext cx="460000" cy="460000"/>
+            <a:off x="780000" y="1951520"/>
+            <a:ext cx="420000" cy="420000"/>
           </a:xfrm>
           <a:prstGeom prst="ellipse">
             <a:avLst/>
@@ -26565,7 +26690,7 @@
           <a:p>
             <a:pPr algn="ctr"/>
             <a:r>
-              <a:rPr sz="1600" b="1">
+              <a:rPr sz="1400" b="1">
                 <a:solidFill>
                   <a:srgbClr val="FFFFFF"/>
                 </a:solidFill>
@@ -26584,8 +26709,8 @@
         </p:nvSpPr>
         <p:spPr>
           <a:xfrm>
-            <a:off x="1450000" y="1620000"/>
-            <a:ext cx="10050000" cy="1250000"/>
+            <a:off x="1380000" y="1449780"/>
+            <a:ext cx="10150000" cy="1423480"/>
           </a:xfrm>
           <a:prstGeom prst="rect">
             <a:avLst/>
@@ -26593,20 +26718,35 @@
           <a:noFill/>
         </p:spPr>
         <p:txBody>
-          <a:bodyPr wrap="square" anchor="ctr" lIns="50800" rIns="50800">
+          <a:bodyPr wrap="square" anchor="ctr">
             <a:spAutoFit/>
           </a:bodyPr>
           <a:lstStyle/>
           <a:p>
-            <a:pPr algn="l"/>
             <a:r>
-              <a:rPr sz="1600" b="0">
+              <a:rPr sz="1500" b="1">
                 <a:solidFill>
-                  <a:srgbClr val="1B2430"/>
+                  <a:srgbClr val="1F3A5F"/>
                 </a:solidFill>
                 <a:latin typeface="Calibri"/>
               </a:rPr>
-              <a:t>Kubernetes (K8s) — konteynerlarni ko'plab mashinalar (tugunlar, nodes) bo'ylab joylashtiradigan, kuzatadigan va tiklaydigan ochiq manbali tizim [9]. Uning asosiy g'oyasi — deklarativ boshqaruv: muhandis «qanday qilish»ni emas, «qanday holat bo'lishi…</a:t>
+              <a:t>Kubernetes (K8s) — konteynerlarni ko'plab mashinalar (tugunlar, nodes) bo'ylab joylashtiradigan, kuzatadigan va tiklaydigan ochiq manbali tizim [9].</a:t>
+            </a:r>
+          </a:p>
+          <a:p>
+            <a:pPr>
+              <a:spcBef>
+                <a:spcPts val="400"/>
+              </a:spcBef>
+            </a:pPr>
+            <a:r>
+              <a:rPr sz="1400">
+                <a:solidFill>
+                  <a:srgbClr val="334055"/>
+                </a:solidFill>
+                <a:latin typeface="Calibri"/>
+              </a:rPr>
+              <a:t>Uning asosiy g'oyasi — deklarativ boshqaruv: muhandis «qanday qilish»ni emas, «qanday holat bo'lishi kerak»ligini YAML manifestlarida yozadi, boshqaruvchilar (controllers) esa haqiqiy holatni istalgan holatga doimo yaqinlashtiradi. Asosiy obyektlar:</a:t>
             </a:r>
           </a:p>
         </p:txBody>
@@ -26619,12 +26759,12 @@
         </p:nvSpPr>
         <p:spPr>
           <a:xfrm>
-            <a:off x="550000" y="2990000"/>
-            <a:ext cx="11100000" cy="1250000"/>
+            <a:off x="550000" y="3023260"/>
+            <a:ext cx="11100000" cy="1503480"/>
           </a:xfrm>
           <a:prstGeom prst="roundRect">
             <a:avLst>
-              <a:gd name="adj" fmla="val 18000"/>
+              <a:gd name="adj" fmla="val 8000"/>
             </a:avLst>
           </a:prstGeom>
           <a:solidFill>
@@ -26665,8 +26805,8 @@
         </p:nvSpPr>
         <p:spPr>
           <a:xfrm>
-            <a:off x="550000" y="2990000"/>
-            <a:ext cx="70000" cy="1250000"/>
+            <a:off x="550000" y="3023260"/>
+            <a:ext cx="70000" cy="1503480"/>
           </a:xfrm>
           <a:prstGeom prst="rect">
             <a:avLst/>
@@ -26709,8 +26849,8 @@
         </p:nvSpPr>
         <p:spPr>
           <a:xfrm>
-            <a:off x="800000" y="3385000"/>
-            <a:ext cx="460000" cy="460000"/>
+            <a:off x="780000" y="3565000"/>
+            <a:ext cx="420000" cy="420000"/>
           </a:xfrm>
           <a:prstGeom prst="ellipse">
             <a:avLst/>
@@ -26743,7 +26883,7 @@
           <a:p>
             <a:pPr algn="ctr"/>
             <a:r>
-              <a:rPr sz="1600" b="1">
+              <a:rPr sz="1400" b="1">
                 <a:solidFill>
                   <a:srgbClr val="FFFFFF"/>
                 </a:solidFill>
@@ -26762,8 +26902,8 @@
         </p:nvSpPr>
         <p:spPr>
           <a:xfrm>
-            <a:off x="1450000" y="2990000"/>
-            <a:ext cx="10050000" cy="1250000"/>
+            <a:off x="1380000" y="3063260"/>
+            <a:ext cx="10150000" cy="1423480"/>
           </a:xfrm>
           <a:prstGeom prst="rect">
             <a:avLst/>
@@ -26771,22 +26911,37 @@
           <a:noFill/>
         </p:spPr>
         <p:txBody>
-          <a:bodyPr wrap="square" anchor="ctr" lIns="50800" rIns="50800">
+          <a:bodyPr wrap="square" anchor="ctr">
             <a:spAutoFit/>
           </a:bodyPr>
           <a:lstStyle/>
           <a:p>
-            <a:pPr algn="l"/>
             <a:r>
-              <a:rPr sz="1600" b="0">
+              <a:rPr sz="1500" b="1">
                 <a:solidFill>
-                  <a:srgbClr val="1B2430"/>
+                  <a:srgbClr val="1F3A5F"/>
                 </a:solidFill>
                 <a:latin typeface="Calibri"/>
               </a:rPr>
               <a:t>GPU — Kubernetes uchun «kengaytirilgan resurs» (extended resource): NVIDIA device plugin (odatda GPU Operator orqali o'rnatiladi) har tugundagi GPU'larni nvidia.com/gpu resursi sifatida e'lon qiladi, Pod esa resources.limits: nvidia.com/gpu: 1 bilan uni…</a:t>
             </a:r>
           </a:p>
+          <a:p>
+            <a:pPr>
+              <a:spcBef>
+                <a:spcPts val="400"/>
+              </a:spcBef>
+            </a:pPr>
+            <a:r>
+              <a:rPr sz="1400">
+                <a:solidFill>
+                  <a:srgbClr val="334055"/>
+                </a:solidFill>
+                <a:latin typeface="Calibri"/>
+              </a:rPr>
+              <a:t>Rejalashtiruvchi (scheduler) faqat bo'sh GPU'li tugunga Pod joylaydi.</a:t>
+            </a:r>
+          </a:p>
         </p:txBody>
       </p:sp>
       <p:sp>
@@ -26797,12 +26952,12 @@
         </p:nvSpPr>
         <p:spPr>
           <a:xfrm>
-            <a:off x="550000" y="4360000"/>
-            <a:ext cx="11100000" cy="1250000"/>
+            <a:off x="550000" y="4636740"/>
+            <a:ext cx="11100000" cy="1503480"/>
           </a:xfrm>
           <a:prstGeom prst="roundRect">
             <a:avLst>
-              <a:gd name="adj" fmla="val 18000"/>
+              <a:gd name="adj" fmla="val 8000"/>
             </a:avLst>
           </a:prstGeom>
           <a:solidFill>
@@ -26843,8 +26998,8 @@
         </p:nvSpPr>
         <p:spPr>
           <a:xfrm>
-            <a:off x="550000" y="4360000"/>
-            <a:ext cx="70000" cy="1250000"/>
+            <a:off x="550000" y="4636740"/>
+            <a:ext cx="70000" cy="1503480"/>
           </a:xfrm>
           <a:prstGeom prst="rect">
             <a:avLst/>
@@ -26887,8 +27042,8 @@
         </p:nvSpPr>
         <p:spPr>
           <a:xfrm>
-            <a:off x="800000" y="4755000"/>
-            <a:ext cx="460000" cy="460000"/>
+            <a:off x="780000" y="5178480"/>
+            <a:ext cx="420000" cy="420000"/>
           </a:xfrm>
           <a:prstGeom prst="ellipse">
             <a:avLst/>
@@ -26921,7 +27076,7 @@
           <a:p>
             <a:pPr algn="ctr"/>
             <a:r>
-              <a:rPr sz="1600" b="1">
+              <a:rPr sz="1400" b="1">
                 <a:solidFill>
                   <a:srgbClr val="FFFFFF"/>
                 </a:solidFill>
@@ -26940,8 +27095,8 @@
         </p:nvSpPr>
         <p:spPr>
           <a:xfrm>
-            <a:off x="1450000" y="4360000"/>
-            <a:ext cx="10050000" cy="1250000"/>
+            <a:off x="1380000" y="4676740"/>
+            <a:ext cx="10150000" cy="1423480"/>
           </a:xfrm>
           <a:prstGeom prst="rect">
             <a:avLst/>
@@ -26949,20 +27104,19 @@
           <a:noFill/>
         </p:spPr>
         <p:txBody>
-          <a:bodyPr wrap="square" anchor="ctr" lIns="50800" rIns="50800">
+          <a:bodyPr wrap="square" anchor="ctr">
             <a:spAutoFit/>
           </a:bodyPr>
           <a:lstStyle/>
           <a:p>
-            <a:pPr algn="l"/>
             <a:r>
-              <a:rPr sz="1600" b="0">
+              <a:rPr sz="1400" b="0">
                 <a:solidFill>
                   <a:srgbClr val="1B2430"/>
                 </a:solidFill>
                 <a:latin typeface="Calibri"/>
               </a:rPr>
-              <a:t>Masshtablash ikki o'qda: HPA nusxa sonini o'zgartiradi (gorizontal), Cluster Autoscaler yoki Karpenter esa bulutdan yangi tugunlar so'raydi; GPU tugunining ishga tushishi 2–5 daqiqa olgani uchun masshtablash siyosati oldindan o'ylanishi kerak. Inferens uchun…</a:t>
+              <a:t>Masshtablash ikki o'qda: HPA nusxa sonini o'zgartiradi (gorizontal), Cluster Autoscaler yoki Karpenter esa bulutdan yangi tugunlar so'raydi; GPU tugunining ishga tushishi 2–5 daqiqa olgani uchun masshtablash siyosati oldindan o'ylanishi kerak.</a:t>
             </a:r>
           </a:p>
         </p:txBody>
